--- a/figures/repeat_4fold_cv.pptx
+++ b/figures/repeat_4fold_cv.pptx
@@ -3173,7 +3173,7 @@
                   <a:srgbClr val="BDD7EE"/>
                 </a:solidFill>
               </a:rPr>
-              <a:t>series_idor  ·  n=139  ·  Metabolite + Morphology + Image</a:t>
+              <a:t>series_idor  ·  n=139  ·  Metabolite (LGBM + LogReg) + Morphology + Image</a:t>
             </a:r>
           </a:p>
         </p:txBody>
@@ -4136,7 +4136,7 @@
         <p:spPr>
           <a:xfrm>
             <a:off x="320040" y="685800"/>
-            <a:ext cx="11430000" cy="3306913"/>
+            <a:ext cx="11430000" cy="2640645"/>
           </a:xfrm>
           <a:prstGeom prst="rect">
             <a:avLst/>
